--- a/LLM_and_Enterprise_RAG_Bootcamp/Slides/Week_09_towards_enterprise_rag.pptx
+++ b/LLM_and_Enterprise_RAG_Bootcamp/Slides/Week_09_towards_enterprise_rag.pptx
@@ -3302,7 +3302,7 @@
         </p:nvSpPr>
         <p:spPr>
           <a:xfrm>
-            <a:off x="548640" y="6035040"/>
+            <a:off x="548640" y="5760720"/>
             <a:ext cx="7315200" cy="365760"/>
           </a:xfrm>
           <a:prstGeom prst="rect">
@@ -3324,7 +3324,7 @@
                 </a:solidFill>
                 <a:latin typeface="Calibri"/>
               </a:rPr>
-              <a:t>Saturday, August 1, 2026</a:t>
+              <a:t>Saturday, November 28, 2026</a:t>
             </a:r>
           </a:p>
         </p:txBody>
@@ -3337,7 +3337,7 @@
         </p:nvSpPr>
         <p:spPr>
           <a:xfrm>
-            <a:off x="548640" y="6400800"/>
+            <a:off x="548640" y="6126480"/>
             <a:ext cx="9144000" cy="365760"/>
           </a:xfrm>
           <a:prstGeom prst="rect">
@@ -3360,6 +3360,41 @@
                 <a:latin typeface="Calibri"/>
               </a:rPr>
               <a:t>LLM and Enterprise RAG Bootcamp | Instructor: Pavan R</a:t>
+            </a:r>
+          </a:p>
+        </p:txBody>
+      </p:sp>
+      <p:sp>
+        <p:nvSpPr>
+          <p:cNvPr id="9" name="TextBox 8"/>
+          <p:cNvSpPr txBox="1"/>
+          <p:nvPr/>
+        </p:nvSpPr>
+        <p:spPr>
+          <a:xfrm>
+            <a:off x="457200" y="6620256"/>
+            <a:ext cx="11247120" cy="201168"/>
+          </a:xfrm>
+          <a:prstGeom prst="rect">
+            <a:avLst/>
+          </a:prstGeom>
+          <a:noFill/>
+        </p:spPr>
+        <p:txBody>
+          <a:bodyPr wrap="square">
+            <a:spAutoFit/>
+          </a:bodyPr>
+          <a:lstStyle/>
+          <a:p>
+            <a:pPr algn="ctr"/>
+            <a:r>
+              <a:rPr sz="800" b="0">
+                <a:solidFill>
+                  <a:srgbClr val="FFFFFF"/>
+                </a:solidFill>
+                <a:latin typeface="Calibri"/>
+              </a:rPr>
+              <a:t>© 2026 Proxiant Academy | info@proxiant.com | proxiant.ai/training</a:t>
             </a:r>
           </a:p>
         </p:txBody>
@@ -3577,6 +3612,41 @@
           </a:p>
         </p:txBody>
       </p:sp>
+      <p:sp>
+        <p:nvSpPr>
+          <p:cNvPr id="7" name="TextBox 6"/>
+          <p:cNvSpPr txBox="1"/>
+          <p:nvPr/>
+        </p:nvSpPr>
+        <p:spPr>
+          <a:xfrm>
+            <a:off x="457200" y="6620256"/>
+            <a:ext cx="11247120" cy="201168"/>
+          </a:xfrm>
+          <a:prstGeom prst="rect">
+            <a:avLst/>
+          </a:prstGeom>
+          <a:noFill/>
+        </p:spPr>
+        <p:txBody>
+          <a:bodyPr wrap="square">
+            <a:spAutoFit/>
+          </a:bodyPr>
+          <a:lstStyle/>
+          <a:p>
+            <a:pPr algn="ctr"/>
+            <a:r>
+              <a:rPr sz="800" b="0">
+                <a:solidFill>
+                  <a:srgbClr val="FFFFFF"/>
+                </a:solidFill>
+                <a:latin typeface="Calibri"/>
+              </a:rPr>
+              <a:t>© 2026 Proxiant Academy | info@proxiant.com | proxiant.ai/training</a:t>
+            </a:r>
+          </a:p>
+        </p:txBody>
+      </p:sp>
     </p:spTree>
   </p:cSld>
   <p:clrMapOvr>
@@ -3790,6 +3860,41 @@
           </a:p>
         </p:txBody>
       </p:sp>
+      <p:sp>
+        <p:nvSpPr>
+          <p:cNvPr id="7" name="TextBox 6"/>
+          <p:cNvSpPr txBox="1"/>
+          <p:nvPr/>
+        </p:nvSpPr>
+        <p:spPr>
+          <a:xfrm>
+            <a:off x="457200" y="6620256"/>
+            <a:ext cx="11247120" cy="201168"/>
+          </a:xfrm>
+          <a:prstGeom prst="rect">
+            <a:avLst/>
+          </a:prstGeom>
+          <a:noFill/>
+        </p:spPr>
+        <p:txBody>
+          <a:bodyPr wrap="square">
+            <a:spAutoFit/>
+          </a:bodyPr>
+          <a:lstStyle/>
+          <a:p>
+            <a:pPr algn="ctr"/>
+            <a:r>
+              <a:rPr sz="800" b="0">
+                <a:solidFill>
+                  <a:srgbClr val="FFFFFF"/>
+                </a:solidFill>
+                <a:latin typeface="Calibri"/>
+              </a:rPr>
+              <a:t>© 2026 Proxiant Academy | info@proxiant.com | proxiant.ai/training</a:t>
+            </a:r>
+          </a:p>
+        </p:txBody>
+      </p:sp>
     </p:spTree>
   </p:cSld>
   <p:clrMapOvr>
@@ -3964,6 +4069,41 @@
           </a:p>
         </p:txBody>
       </p:sp>
+      <p:sp>
+        <p:nvSpPr>
+          <p:cNvPr id="6" name="TextBox 5"/>
+          <p:cNvSpPr txBox="1"/>
+          <p:nvPr/>
+        </p:nvSpPr>
+        <p:spPr>
+          <a:xfrm>
+            <a:off x="457200" y="6620256"/>
+            <a:ext cx="11247120" cy="201168"/>
+          </a:xfrm>
+          <a:prstGeom prst="rect">
+            <a:avLst/>
+          </a:prstGeom>
+          <a:noFill/>
+        </p:spPr>
+        <p:txBody>
+          <a:bodyPr wrap="square">
+            <a:spAutoFit/>
+          </a:bodyPr>
+          <a:lstStyle/>
+          <a:p>
+            <a:pPr algn="ctr"/>
+            <a:r>
+              <a:rPr sz="800" b="0">
+                <a:solidFill>
+                  <a:srgbClr val="1E2761"/>
+                </a:solidFill>
+                <a:latin typeface="Calibri"/>
+              </a:rPr>
+              <a:t>© 2026 Proxiant Academy | info@proxiant.com | proxiant.ai/training</a:t>
+            </a:r>
+          </a:p>
+        </p:txBody>
+      </p:sp>
     </p:spTree>
   </p:cSld>
   <p:clrMapOvr>
@@ -4177,6 +4317,41 @@
           </a:p>
         </p:txBody>
       </p:sp>
+      <p:sp>
+        <p:nvSpPr>
+          <p:cNvPr id="7" name="TextBox 6"/>
+          <p:cNvSpPr txBox="1"/>
+          <p:nvPr/>
+        </p:nvSpPr>
+        <p:spPr>
+          <a:xfrm>
+            <a:off x="457200" y="6620256"/>
+            <a:ext cx="11247120" cy="201168"/>
+          </a:xfrm>
+          <a:prstGeom prst="rect">
+            <a:avLst/>
+          </a:prstGeom>
+          <a:noFill/>
+        </p:spPr>
+        <p:txBody>
+          <a:bodyPr wrap="square">
+            <a:spAutoFit/>
+          </a:bodyPr>
+          <a:lstStyle/>
+          <a:p>
+            <a:pPr algn="ctr"/>
+            <a:r>
+              <a:rPr sz="800" b="0">
+                <a:solidFill>
+                  <a:srgbClr val="FFFFFF"/>
+                </a:solidFill>
+                <a:latin typeface="Calibri"/>
+              </a:rPr>
+              <a:t>© 2026 Proxiant Academy | info@proxiant.com | proxiant.ai/training</a:t>
+            </a:r>
+          </a:p>
+        </p:txBody>
+      </p:sp>
     </p:spTree>
   </p:cSld>
   <p:clrMapOvr>
@@ -4471,6 +4646,41 @@
           </a:p>
         </p:txBody>
       </p:sp>
+      <p:sp>
+        <p:nvSpPr>
+          <p:cNvPr id="7" name="TextBox 6"/>
+          <p:cNvSpPr txBox="1"/>
+          <p:nvPr/>
+        </p:nvSpPr>
+        <p:spPr>
+          <a:xfrm>
+            <a:off x="457200" y="6620256"/>
+            <a:ext cx="11247120" cy="201168"/>
+          </a:xfrm>
+          <a:prstGeom prst="rect">
+            <a:avLst/>
+          </a:prstGeom>
+          <a:noFill/>
+        </p:spPr>
+        <p:txBody>
+          <a:bodyPr wrap="square">
+            <a:spAutoFit/>
+          </a:bodyPr>
+          <a:lstStyle/>
+          <a:p>
+            <a:pPr algn="ctr"/>
+            <a:r>
+              <a:rPr sz="800" b="0">
+                <a:solidFill>
+                  <a:srgbClr val="FFFFFF"/>
+                </a:solidFill>
+                <a:latin typeface="Calibri"/>
+              </a:rPr>
+              <a:t>© 2026 Proxiant Academy | info@proxiant.com | proxiant.ai/training</a:t>
+            </a:r>
+          </a:p>
+        </p:txBody>
+      </p:sp>
     </p:spTree>
   </p:cSld>
   <p:clrMapOvr>
@@ -4684,6 +4894,41 @@
           </a:p>
         </p:txBody>
       </p:sp>
+      <p:sp>
+        <p:nvSpPr>
+          <p:cNvPr id="7" name="TextBox 6"/>
+          <p:cNvSpPr txBox="1"/>
+          <p:nvPr/>
+        </p:nvSpPr>
+        <p:spPr>
+          <a:xfrm>
+            <a:off x="457200" y="6620256"/>
+            <a:ext cx="11247120" cy="201168"/>
+          </a:xfrm>
+          <a:prstGeom prst="rect">
+            <a:avLst/>
+          </a:prstGeom>
+          <a:noFill/>
+        </p:spPr>
+        <p:txBody>
+          <a:bodyPr wrap="square">
+            <a:spAutoFit/>
+          </a:bodyPr>
+          <a:lstStyle/>
+          <a:p>
+            <a:pPr algn="ctr"/>
+            <a:r>
+              <a:rPr sz="800" b="0">
+                <a:solidFill>
+                  <a:srgbClr val="FFFFFF"/>
+                </a:solidFill>
+                <a:latin typeface="Calibri"/>
+              </a:rPr>
+              <a:t>© 2026 Proxiant Academy | info@proxiant.com | proxiant.ai/training</a:t>
+            </a:r>
+          </a:p>
+        </p:txBody>
+      </p:sp>
     </p:spTree>
   </p:cSld>
   <p:clrMapOvr>
@@ -4897,6 +5142,41 @@
           </a:p>
         </p:txBody>
       </p:sp>
+      <p:sp>
+        <p:nvSpPr>
+          <p:cNvPr id="7" name="TextBox 6"/>
+          <p:cNvSpPr txBox="1"/>
+          <p:nvPr/>
+        </p:nvSpPr>
+        <p:spPr>
+          <a:xfrm>
+            <a:off x="457200" y="6620256"/>
+            <a:ext cx="11247120" cy="201168"/>
+          </a:xfrm>
+          <a:prstGeom prst="rect">
+            <a:avLst/>
+          </a:prstGeom>
+          <a:noFill/>
+        </p:spPr>
+        <p:txBody>
+          <a:bodyPr wrap="square">
+            <a:spAutoFit/>
+          </a:bodyPr>
+          <a:lstStyle/>
+          <a:p>
+            <a:pPr algn="ctr"/>
+            <a:r>
+              <a:rPr sz="800" b="0">
+                <a:solidFill>
+                  <a:srgbClr val="FFFFFF"/>
+                </a:solidFill>
+                <a:latin typeface="Calibri"/>
+              </a:rPr>
+              <a:t>© 2026 Proxiant Academy | info@proxiant.com | proxiant.ai/training</a:t>
+            </a:r>
+          </a:p>
+        </p:txBody>
+      </p:sp>
     </p:spTree>
   </p:cSld>
   <p:clrMapOvr>
@@ -5110,6 +5390,41 @@
           </a:p>
         </p:txBody>
       </p:sp>
+      <p:sp>
+        <p:nvSpPr>
+          <p:cNvPr id="7" name="TextBox 6"/>
+          <p:cNvSpPr txBox="1"/>
+          <p:nvPr/>
+        </p:nvSpPr>
+        <p:spPr>
+          <a:xfrm>
+            <a:off x="457200" y="6620256"/>
+            <a:ext cx="11247120" cy="201168"/>
+          </a:xfrm>
+          <a:prstGeom prst="rect">
+            <a:avLst/>
+          </a:prstGeom>
+          <a:noFill/>
+        </p:spPr>
+        <p:txBody>
+          <a:bodyPr wrap="square">
+            <a:spAutoFit/>
+          </a:bodyPr>
+          <a:lstStyle/>
+          <a:p>
+            <a:pPr algn="ctr"/>
+            <a:r>
+              <a:rPr sz="800" b="0">
+                <a:solidFill>
+                  <a:srgbClr val="FFFFFF"/>
+                </a:solidFill>
+                <a:latin typeface="Calibri"/>
+              </a:rPr>
+              <a:t>© 2026 Proxiant Academy | info@proxiant.com | proxiant.ai/training</a:t>
+            </a:r>
+          </a:p>
+        </p:txBody>
+      </p:sp>
     </p:spTree>
   </p:cSld>
   <p:clrMapOvr>
@@ -5323,6 +5638,41 @@
           </a:p>
         </p:txBody>
       </p:sp>
+      <p:sp>
+        <p:nvSpPr>
+          <p:cNvPr id="7" name="TextBox 6"/>
+          <p:cNvSpPr txBox="1"/>
+          <p:nvPr/>
+        </p:nvSpPr>
+        <p:spPr>
+          <a:xfrm>
+            <a:off x="457200" y="6620256"/>
+            <a:ext cx="11247120" cy="201168"/>
+          </a:xfrm>
+          <a:prstGeom prst="rect">
+            <a:avLst/>
+          </a:prstGeom>
+          <a:noFill/>
+        </p:spPr>
+        <p:txBody>
+          <a:bodyPr wrap="square">
+            <a:spAutoFit/>
+          </a:bodyPr>
+          <a:lstStyle/>
+          <a:p>
+            <a:pPr algn="ctr"/>
+            <a:r>
+              <a:rPr sz="800" b="0">
+                <a:solidFill>
+                  <a:srgbClr val="FFFFFF"/>
+                </a:solidFill>
+                <a:latin typeface="Calibri"/>
+              </a:rPr>
+              <a:t>© 2026 Proxiant Academy | info@proxiant.com | proxiant.ai/training</a:t>
+            </a:r>
+          </a:p>
+        </p:txBody>
+      </p:sp>
     </p:spTree>
   </p:cSld>
   <p:clrMapOvr>
@@ -5497,6 +5847,41 @@
           </a:p>
         </p:txBody>
       </p:sp>
+      <p:sp>
+        <p:nvSpPr>
+          <p:cNvPr id="6" name="TextBox 5"/>
+          <p:cNvSpPr txBox="1"/>
+          <p:nvPr/>
+        </p:nvSpPr>
+        <p:spPr>
+          <a:xfrm>
+            <a:off x="457200" y="6620256"/>
+            <a:ext cx="11247120" cy="201168"/>
+          </a:xfrm>
+          <a:prstGeom prst="rect">
+            <a:avLst/>
+          </a:prstGeom>
+          <a:noFill/>
+        </p:spPr>
+        <p:txBody>
+          <a:bodyPr wrap="square">
+            <a:spAutoFit/>
+          </a:bodyPr>
+          <a:lstStyle/>
+          <a:p>
+            <a:pPr algn="ctr"/>
+            <a:r>
+              <a:rPr sz="800" b="0">
+                <a:solidFill>
+                  <a:srgbClr val="1E2761"/>
+                </a:solidFill>
+                <a:latin typeface="Calibri"/>
+              </a:rPr>
+              <a:t>© 2026 Proxiant Academy | info@proxiant.com | proxiant.ai/training</a:t>
+            </a:r>
+          </a:p>
+        </p:txBody>
+      </p:sp>
     </p:spTree>
   </p:cSld>
   <p:clrMapOvr>
@@ -5671,6 +6056,41 @@
           </a:p>
         </p:txBody>
       </p:sp>
+      <p:sp>
+        <p:nvSpPr>
+          <p:cNvPr id="6" name="TextBox 5"/>
+          <p:cNvSpPr txBox="1"/>
+          <p:nvPr/>
+        </p:nvSpPr>
+        <p:spPr>
+          <a:xfrm>
+            <a:off x="457200" y="6620256"/>
+            <a:ext cx="11247120" cy="201168"/>
+          </a:xfrm>
+          <a:prstGeom prst="rect">
+            <a:avLst/>
+          </a:prstGeom>
+          <a:noFill/>
+        </p:spPr>
+        <p:txBody>
+          <a:bodyPr wrap="square">
+            <a:spAutoFit/>
+          </a:bodyPr>
+          <a:lstStyle/>
+          <a:p>
+            <a:pPr algn="ctr"/>
+            <a:r>
+              <a:rPr sz="800" b="0">
+                <a:solidFill>
+                  <a:srgbClr val="1E2761"/>
+                </a:solidFill>
+                <a:latin typeface="Calibri"/>
+              </a:rPr>
+              <a:t>© 2026 Proxiant Academy | info@proxiant.com | proxiant.ai/training</a:t>
+            </a:r>
+          </a:p>
+        </p:txBody>
+      </p:sp>
     </p:spTree>
   </p:cSld>
   <p:clrMapOvr>
@@ -5884,6 +6304,41 @@
           </a:p>
         </p:txBody>
       </p:sp>
+      <p:sp>
+        <p:nvSpPr>
+          <p:cNvPr id="7" name="TextBox 6"/>
+          <p:cNvSpPr txBox="1"/>
+          <p:nvPr/>
+        </p:nvSpPr>
+        <p:spPr>
+          <a:xfrm>
+            <a:off x="457200" y="6620256"/>
+            <a:ext cx="11247120" cy="201168"/>
+          </a:xfrm>
+          <a:prstGeom prst="rect">
+            <a:avLst/>
+          </a:prstGeom>
+          <a:noFill/>
+        </p:spPr>
+        <p:txBody>
+          <a:bodyPr wrap="square">
+            <a:spAutoFit/>
+          </a:bodyPr>
+          <a:lstStyle/>
+          <a:p>
+            <a:pPr algn="ctr"/>
+            <a:r>
+              <a:rPr sz="800" b="0">
+                <a:solidFill>
+                  <a:srgbClr val="FFFFFF"/>
+                </a:solidFill>
+                <a:latin typeface="Calibri"/>
+              </a:rPr>
+              <a:t>© 2026 Proxiant Academy | info@proxiant.com | proxiant.ai/training</a:t>
+            </a:r>
+          </a:p>
+        </p:txBody>
+      </p:sp>
     </p:spTree>
   </p:cSld>
   <p:clrMapOvr>
@@ -6097,6 +6552,41 @@
           </a:p>
         </p:txBody>
       </p:sp>
+      <p:sp>
+        <p:nvSpPr>
+          <p:cNvPr id="7" name="TextBox 6"/>
+          <p:cNvSpPr txBox="1"/>
+          <p:nvPr/>
+        </p:nvSpPr>
+        <p:spPr>
+          <a:xfrm>
+            <a:off x="457200" y="6620256"/>
+            <a:ext cx="11247120" cy="201168"/>
+          </a:xfrm>
+          <a:prstGeom prst="rect">
+            <a:avLst/>
+          </a:prstGeom>
+          <a:noFill/>
+        </p:spPr>
+        <p:txBody>
+          <a:bodyPr wrap="square">
+            <a:spAutoFit/>
+          </a:bodyPr>
+          <a:lstStyle/>
+          <a:p>
+            <a:pPr algn="ctr"/>
+            <a:r>
+              <a:rPr sz="800" b="0">
+                <a:solidFill>
+                  <a:srgbClr val="FFFFFF"/>
+                </a:solidFill>
+                <a:latin typeface="Calibri"/>
+              </a:rPr>
+              <a:t>© 2026 Proxiant Academy | info@proxiant.com | proxiant.ai/training</a:t>
+            </a:r>
+          </a:p>
+        </p:txBody>
+      </p:sp>
     </p:spTree>
   </p:cSld>
   <p:clrMapOvr>
@@ -6271,6 +6761,41 @@
           </a:p>
         </p:txBody>
       </p:sp>
+      <p:sp>
+        <p:nvSpPr>
+          <p:cNvPr id="6" name="TextBox 5"/>
+          <p:cNvSpPr txBox="1"/>
+          <p:nvPr/>
+        </p:nvSpPr>
+        <p:spPr>
+          <a:xfrm>
+            <a:off x="457200" y="6620256"/>
+            <a:ext cx="11247120" cy="201168"/>
+          </a:xfrm>
+          <a:prstGeom prst="rect">
+            <a:avLst/>
+          </a:prstGeom>
+          <a:noFill/>
+        </p:spPr>
+        <p:txBody>
+          <a:bodyPr wrap="square">
+            <a:spAutoFit/>
+          </a:bodyPr>
+          <a:lstStyle/>
+          <a:p>
+            <a:pPr algn="ctr"/>
+            <a:r>
+              <a:rPr sz="800" b="0">
+                <a:solidFill>
+                  <a:srgbClr val="1E2761"/>
+                </a:solidFill>
+                <a:latin typeface="Calibri"/>
+              </a:rPr>
+              <a:t>© 2026 Proxiant Academy | info@proxiant.com | proxiant.ai/training</a:t>
+            </a:r>
+          </a:p>
+        </p:txBody>
+      </p:sp>
     </p:spTree>
   </p:cSld>
   <p:clrMapOvr>
@@ -6532,6 +7057,41 @@
           </a:p>
         </p:txBody>
       </p:sp>
+      <p:sp>
+        <p:nvSpPr>
+          <p:cNvPr id="7" name="TextBox 6"/>
+          <p:cNvSpPr txBox="1"/>
+          <p:nvPr/>
+        </p:nvSpPr>
+        <p:spPr>
+          <a:xfrm>
+            <a:off x="457200" y="6620256"/>
+            <a:ext cx="11247120" cy="201168"/>
+          </a:xfrm>
+          <a:prstGeom prst="rect">
+            <a:avLst/>
+          </a:prstGeom>
+          <a:noFill/>
+        </p:spPr>
+        <p:txBody>
+          <a:bodyPr wrap="square">
+            <a:spAutoFit/>
+          </a:bodyPr>
+          <a:lstStyle/>
+          <a:p>
+            <a:pPr algn="ctr"/>
+            <a:r>
+              <a:rPr sz="800" b="0">
+                <a:solidFill>
+                  <a:srgbClr val="FFFFFF"/>
+                </a:solidFill>
+                <a:latin typeface="Calibri"/>
+              </a:rPr>
+              <a:t>© 2026 Proxiant Academy | info@proxiant.com | proxiant.ai/training</a:t>
+            </a:r>
+          </a:p>
+        </p:txBody>
+      </p:sp>
     </p:spTree>
   </p:cSld>
   <p:clrMapOvr>
@@ -6776,7 +7336,7 @@
         </p:nvSpPr>
         <p:spPr>
           <a:xfrm>
-            <a:off x="640080" y="6400800"/>
+            <a:off x="640080" y="6217920"/>
             <a:ext cx="10972800" cy="365760"/>
           </a:xfrm>
           <a:prstGeom prst="rect">
@@ -6799,6 +7359,41 @@
                 <a:latin typeface="Calibri"/>
               </a:rPr>
               <a:t>Quiz Tuesday | Project due next Saturday | Instructor: Pavan R</a:t>
+            </a:r>
+          </a:p>
+        </p:txBody>
+      </p:sp>
+      <p:sp>
+        <p:nvSpPr>
+          <p:cNvPr id="9" name="TextBox 8"/>
+          <p:cNvSpPr txBox="1"/>
+          <p:nvPr/>
+        </p:nvSpPr>
+        <p:spPr>
+          <a:xfrm>
+            <a:off x="457200" y="6620256"/>
+            <a:ext cx="11247120" cy="201168"/>
+          </a:xfrm>
+          <a:prstGeom prst="rect">
+            <a:avLst/>
+          </a:prstGeom>
+          <a:noFill/>
+        </p:spPr>
+        <p:txBody>
+          <a:bodyPr wrap="square">
+            <a:spAutoFit/>
+          </a:bodyPr>
+          <a:lstStyle/>
+          <a:p>
+            <a:pPr algn="ctr"/>
+            <a:r>
+              <a:rPr sz="800" b="0">
+                <a:solidFill>
+                  <a:srgbClr val="FFFFFF"/>
+                </a:solidFill>
+                <a:latin typeface="Calibri"/>
+              </a:rPr>
+              <a:t>© 2026 Proxiant Academy | info@proxiant.com | proxiant.ai/training</a:t>
             </a:r>
           </a:p>
         </p:txBody>
@@ -7016,6 +7611,41 @@
           </a:p>
         </p:txBody>
       </p:sp>
+      <p:sp>
+        <p:nvSpPr>
+          <p:cNvPr id="7" name="TextBox 6"/>
+          <p:cNvSpPr txBox="1"/>
+          <p:nvPr/>
+        </p:nvSpPr>
+        <p:spPr>
+          <a:xfrm>
+            <a:off x="457200" y="6620256"/>
+            <a:ext cx="11247120" cy="201168"/>
+          </a:xfrm>
+          <a:prstGeom prst="rect">
+            <a:avLst/>
+          </a:prstGeom>
+          <a:noFill/>
+        </p:spPr>
+        <p:txBody>
+          <a:bodyPr wrap="square">
+            <a:spAutoFit/>
+          </a:bodyPr>
+          <a:lstStyle/>
+          <a:p>
+            <a:pPr algn="ctr"/>
+            <a:r>
+              <a:rPr sz="800" b="0">
+                <a:solidFill>
+                  <a:srgbClr val="FFFFFF"/>
+                </a:solidFill>
+                <a:latin typeface="Calibri"/>
+              </a:rPr>
+              <a:t>© 2026 Proxiant Academy | info@proxiant.com | proxiant.ai/training</a:t>
+            </a:r>
+          </a:p>
+        </p:txBody>
+      </p:sp>
     </p:spTree>
   </p:cSld>
   <p:clrMapOvr>
@@ -7293,6 +7923,41 @@
           </a:p>
         </p:txBody>
       </p:sp>
+      <p:sp>
+        <p:nvSpPr>
+          <p:cNvPr id="7" name="TextBox 6"/>
+          <p:cNvSpPr txBox="1"/>
+          <p:nvPr/>
+        </p:nvSpPr>
+        <p:spPr>
+          <a:xfrm>
+            <a:off x="457200" y="6620256"/>
+            <a:ext cx="11247120" cy="201168"/>
+          </a:xfrm>
+          <a:prstGeom prst="rect">
+            <a:avLst/>
+          </a:prstGeom>
+          <a:noFill/>
+        </p:spPr>
+        <p:txBody>
+          <a:bodyPr wrap="square">
+            <a:spAutoFit/>
+          </a:bodyPr>
+          <a:lstStyle/>
+          <a:p>
+            <a:pPr algn="ctr"/>
+            <a:r>
+              <a:rPr sz="800" b="0">
+                <a:solidFill>
+                  <a:srgbClr val="FFFFFF"/>
+                </a:solidFill>
+                <a:latin typeface="Calibri"/>
+              </a:rPr>
+              <a:t>© 2026 Proxiant Academy | info@proxiant.com | proxiant.ai/training</a:t>
+            </a:r>
+          </a:p>
+        </p:txBody>
+      </p:sp>
     </p:spTree>
   </p:cSld>
   <p:clrMapOvr>
@@ -7467,6 +8132,41 @@
           </a:p>
         </p:txBody>
       </p:sp>
+      <p:sp>
+        <p:nvSpPr>
+          <p:cNvPr id="6" name="TextBox 5"/>
+          <p:cNvSpPr txBox="1"/>
+          <p:nvPr/>
+        </p:nvSpPr>
+        <p:spPr>
+          <a:xfrm>
+            <a:off x="457200" y="6620256"/>
+            <a:ext cx="11247120" cy="201168"/>
+          </a:xfrm>
+          <a:prstGeom prst="rect">
+            <a:avLst/>
+          </a:prstGeom>
+          <a:noFill/>
+        </p:spPr>
+        <p:txBody>
+          <a:bodyPr wrap="square">
+            <a:spAutoFit/>
+          </a:bodyPr>
+          <a:lstStyle/>
+          <a:p>
+            <a:pPr algn="ctr"/>
+            <a:r>
+              <a:rPr sz="800" b="0">
+                <a:solidFill>
+                  <a:srgbClr val="1E2761"/>
+                </a:solidFill>
+                <a:latin typeface="Calibri"/>
+              </a:rPr>
+              <a:t>© 2026 Proxiant Academy | info@proxiant.com | proxiant.ai/training</a:t>
+            </a:r>
+          </a:p>
+        </p:txBody>
+      </p:sp>
     </p:spTree>
   </p:cSld>
   <p:clrMapOvr>
@@ -7680,6 +8380,41 @@
           </a:p>
         </p:txBody>
       </p:sp>
+      <p:sp>
+        <p:nvSpPr>
+          <p:cNvPr id="7" name="TextBox 6"/>
+          <p:cNvSpPr txBox="1"/>
+          <p:nvPr/>
+        </p:nvSpPr>
+        <p:spPr>
+          <a:xfrm>
+            <a:off x="457200" y="6620256"/>
+            <a:ext cx="11247120" cy="201168"/>
+          </a:xfrm>
+          <a:prstGeom prst="rect">
+            <a:avLst/>
+          </a:prstGeom>
+          <a:noFill/>
+        </p:spPr>
+        <p:txBody>
+          <a:bodyPr wrap="square">
+            <a:spAutoFit/>
+          </a:bodyPr>
+          <a:lstStyle/>
+          <a:p>
+            <a:pPr algn="ctr"/>
+            <a:r>
+              <a:rPr sz="800" b="0">
+                <a:solidFill>
+                  <a:srgbClr val="FFFFFF"/>
+                </a:solidFill>
+                <a:latin typeface="Calibri"/>
+              </a:rPr>
+              <a:t>© 2026 Proxiant Academy | info@proxiant.com | proxiant.ai/training</a:t>
+            </a:r>
+          </a:p>
+        </p:txBody>
+      </p:sp>
     </p:spTree>
   </p:cSld>
   <p:clrMapOvr>
@@ -7893,6 +8628,41 @@
           </a:p>
         </p:txBody>
       </p:sp>
+      <p:sp>
+        <p:nvSpPr>
+          <p:cNvPr id="7" name="TextBox 6"/>
+          <p:cNvSpPr txBox="1"/>
+          <p:nvPr/>
+        </p:nvSpPr>
+        <p:spPr>
+          <a:xfrm>
+            <a:off x="457200" y="6620256"/>
+            <a:ext cx="11247120" cy="201168"/>
+          </a:xfrm>
+          <a:prstGeom prst="rect">
+            <a:avLst/>
+          </a:prstGeom>
+          <a:noFill/>
+        </p:spPr>
+        <p:txBody>
+          <a:bodyPr wrap="square">
+            <a:spAutoFit/>
+          </a:bodyPr>
+          <a:lstStyle/>
+          <a:p>
+            <a:pPr algn="ctr"/>
+            <a:r>
+              <a:rPr sz="800" b="0">
+                <a:solidFill>
+                  <a:srgbClr val="FFFFFF"/>
+                </a:solidFill>
+                <a:latin typeface="Calibri"/>
+              </a:rPr>
+              <a:t>© 2026 Proxiant Academy | info@proxiant.com | proxiant.ai/training</a:t>
+            </a:r>
+          </a:p>
+        </p:txBody>
+      </p:sp>
     </p:spTree>
   </p:cSld>
   <p:clrMapOvr>
@@ -8106,6 +8876,41 @@
           </a:p>
         </p:txBody>
       </p:sp>
+      <p:sp>
+        <p:nvSpPr>
+          <p:cNvPr id="7" name="TextBox 6"/>
+          <p:cNvSpPr txBox="1"/>
+          <p:nvPr/>
+        </p:nvSpPr>
+        <p:spPr>
+          <a:xfrm>
+            <a:off x="457200" y="6620256"/>
+            <a:ext cx="11247120" cy="201168"/>
+          </a:xfrm>
+          <a:prstGeom prst="rect">
+            <a:avLst/>
+          </a:prstGeom>
+          <a:noFill/>
+        </p:spPr>
+        <p:txBody>
+          <a:bodyPr wrap="square">
+            <a:spAutoFit/>
+          </a:bodyPr>
+          <a:lstStyle/>
+          <a:p>
+            <a:pPr algn="ctr"/>
+            <a:r>
+              <a:rPr sz="800" b="0">
+                <a:solidFill>
+                  <a:srgbClr val="FFFFFF"/>
+                </a:solidFill>
+                <a:latin typeface="Calibri"/>
+              </a:rPr>
+              <a:t>© 2026 Proxiant Academy | info@proxiant.com | proxiant.ai/training</a:t>
+            </a:r>
+          </a:p>
+        </p:txBody>
+      </p:sp>
     </p:spTree>
   </p:cSld>
   <p:clrMapOvr>
@@ -8316,6 +9121,41 @@
           <a:lstStyle/>
           <a:p>
             <a:pPr algn="ctr"/>
+          </a:p>
+        </p:txBody>
+      </p:sp>
+      <p:sp>
+        <p:nvSpPr>
+          <p:cNvPr id="7" name="TextBox 6"/>
+          <p:cNvSpPr txBox="1"/>
+          <p:nvPr/>
+        </p:nvSpPr>
+        <p:spPr>
+          <a:xfrm>
+            <a:off x="457200" y="6620256"/>
+            <a:ext cx="11247120" cy="201168"/>
+          </a:xfrm>
+          <a:prstGeom prst="rect">
+            <a:avLst/>
+          </a:prstGeom>
+          <a:noFill/>
+        </p:spPr>
+        <p:txBody>
+          <a:bodyPr wrap="square">
+            <a:spAutoFit/>
+          </a:bodyPr>
+          <a:lstStyle/>
+          <a:p>
+            <a:pPr algn="ctr"/>
+            <a:r>
+              <a:rPr sz="800" b="0">
+                <a:solidFill>
+                  <a:srgbClr val="FFFFFF"/>
+                </a:solidFill>
+                <a:latin typeface="Calibri"/>
+              </a:rPr>
+              <a:t>© 2026 Proxiant Academy | info@proxiant.com | proxiant.ai/training</a:t>
+            </a:r>
           </a:p>
         </p:txBody>
       </p:sp>
